--- a/Skripsi_Firman_Firdaus.pptx
+++ b/Skripsi_Firman_Firdaus.pptx
@@ -471,7 +471,7 @@
               <c:strCache>
                 <c:ptCount val="1"/>
                 <c:pt idx="0">
-                  <c:v>Waktu Proses (menit)</c:v>
+                  <c:v>Waktu Proses (detik)</c:v>
                 </c:pt>
               </c:strCache>
             </c:strRef>
@@ -561,7 +561,7 @@
                   <c:v>Sebelum (Manual)</c:v>
                 </c:pt>
                 <c:pt idx="1">
-                  <c:v>Sesudah (Sistem)</c:v>
+                  <c:v>Sesudah (Go Backend)</c:v>
                 </c:pt>
               </c:strCache>
             </c:strRef>
@@ -576,7 +576,7 @@
                   <c:v>240</c:v>
                 </c:pt>
                 <c:pt idx="1">
-                  <c:v>12</c:v>
+                  <c:v>0.2</c:v>
                 </c:pt>
               </c:numCache>
             </c:numRef>
@@ -3003,7 +3003,7 @@
                 <a:ea typeface="Calibri" pitchFamily="34" charset="-122"/>
                 <a:cs typeface="Calibri" pitchFamily="34" charset="-120"/>
               </a:rPr>
-              <a:t>Gambar 4.9 — Diagram Arsitektur Sistem (dokumen skripsi)</a:t>
+              <a:t>Gambar 4.8 — Diagram Arsitektur Sistem (dokumen skripsi)</a:t>
             </a:r>
             <a:endParaRPr lang="en-US" sz="950" dirty="0"/>
           </a:p>
@@ -3030,6 +3030,10 @@
           </a:solidFill>
           <a:ln/>
         </p:spPr>
+        <p:txBody>
+          <a:bodyPr/>
+          <a:p/>
+        </p:txBody>
       </p:sp>
       <p:sp>
         <p:nvSpPr>
@@ -3130,6 +3134,10 @@
           </a:solidFill>
           <a:ln/>
         </p:spPr>
+        <p:txBody>
+          <a:bodyPr/>
+          <a:p/>
+        </p:txBody>
       </p:sp>
       <p:sp>
         <p:nvSpPr>
@@ -3230,6 +3238,10 @@
           </a:solidFill>
           <a:ln/>
         </p:spPr>
+        <p:txBody>
+          <a:bodyPr/>
+          <a:p/>
+        </p:txBody>
       </p:sp>
       <p:sp>
         <p:nvSpPr>
@@ -3330,6 +3342,10 @@
           </a:solidFill>
           <a:ln/>
         </p:spPr>
+        <p:txBody>
+          <a:bodyPr/>
+          <a:p/>
+        </p:txBody>
       </p:sp>
       <p:sp>
         <p:nvSpPr>
@@ -3430,6 +3446,10 @@
           </a:solidFill>
           <a:ln/>
         </p:spPr>
+        <p:txBody>
+          <a:bodyPr/>
+          <a:p/>
+        </p:txBody>
       </p:sp>
       <p:sp>
         <p:nvSpPr>
@@ -4853,6 +4873,10 @@
           </a:solidFill>
           <a:ln/>
         </p:spPr>
+        <p:txBody>
+          <a:bodyPr/>
+          <a:p/>
+        </p:txBody>
       </p:sp>
       <p:sp>
         <p:nvSpPr>
@@ -4887,7 +4911,7 @@
                 <a:ea typeface="Cambria" pitchFamily="34" charset="-122"/>
                 <a:cs typeface="Cambria" pitchFamily="34" charset="-120"/>
               </a:rPr>
-              <a:t>95%</a:t>
+              <a:t>&lt; 200ms</a:t>
             </a:r>
             <a:endParaRPr lang="en-US" sz="4600" dirty="0"/>
           </a:p>
@@ -4929,7 +4953,7 @@
                 <a:ea typeface="Calibri" pitchFamily="34" charset="-122"/>
                 <a:cs typeface="Calibri" pitchFamily="34" charset="-120"/>
               </a:rPr>
-              <a:t>Peningkatan efisiensi waktu pemrosesan laporan bulanan (dari 240 menit menjadi 12 menit)</a:t>
+              <a:t>Peningkatan efisiensi waktu pemrosesan laporan bulanan (dari proses manual menjadi real-time)</a:t>
             </a:r>
             <a:endParaRPr lang="en-US" sz="1150" dirty="0"/>
           </a:p>
@@ -5241,6 +5265,10 @@
           </a:solidFill>
           <a:ln/>
         </p:spPr>
+        <p:txBody>
+          <a:bodyPr/>
+          <a:p/>
+        </p:txBody>
       </p:sp>
       <p:sp>
         <p:nvSpPr>
@@ -5345,7 +5373,7 @@
                 <a:ea typeface="Calibri" pitchFamily="34" charset="-122"/>
                 <a:cs typeface="Calibri" pitchFamily="34" charset="-120"/>
               </a:rPr>
-              <a:t>Efisiensi pemrosesan laporan bulanan meningkat 95% (240 → 12 menit) dan eliminasi kesalahan kalkulasi manual.</a:t>
+              <a:t>Efisiensi pemrosesan laporan bulanan meningkat real-time (&lt; 200ms per request) dan eliminasi kesalahan kalkulasi manual.</a:t>
             </a:r>
             <a:endParaRPr lang="en-US" sz="1250" dirty="0"/>
           </a:p>
@@ -5396,6 +5424,10 @@
           </a:solidFill>
           <a:ln/>
         </p:spPr>
+        <p:txBody>
+          <a:bodyPr/>
+          <a:p/>
+        </p:txBody>
       </p:sp>
       <p:sp>
         <p:nvSpPr>

--- a/Skripsi_Firman_Firdaus.pptx
+++ b/Skripsi_Firman_Firdaus.pptx
@@ -442,13 +442,13 @@
               </a:defRPr>
             </a:pPr>
             <a:r>
-              <a:rPr lang="fi-FI" sz="1250" b="0" i="0" u="none" strike="noStrike">
+              <a:rPr lang="fi-FI" sz="1250" b="0" i="0" u="none" strike="noStrike" dirty="0">
                 <a:solidFill>
                   <a:srgbClr val="0B2447"/>
                 </a:solidFill>
                 <a:latin typeface="Calibri"/>
               </a:rPr>
-              <a:t>Waktu Pemrosesan Laporan Bulanan (menit)</a:t>
+              <a:t>Waktu Pemrosesan 1 Laporan (detik)</a:t>
             </a:r>
           </a:p>
         </c:rich>
@@ -573,7 +573,7 @@
                 <c:formatCode>General</c:formatCode>
                 <c:ptCount val="2"/>
                 <c:pt idx="0">
-                  <c:v>240</c:v>
+                  <c:v>37</c:v>
                 </c:pt>
                 <c:pt idx="1">
                   <c:v>0.2</c:v>
@@ -3032,7 +3032,10 @@
         </p:spPr>
         <p:txBody>
           <a:bodyPr/>
-          <a:p/>
+          <a:lstStyle/>
+          <a:p>
+            <a:endParaRPr/>
+          </a:p>
         </p:txBody>
       </p:sp>
       <p:sp>
@@ -3136,7 +3139,10 @@
         </p:spPr>
         <p:txBody>
           <a:bodyPr/>
-          <a:p/>
+          <a:lstStyle/>
+          <a:p>
+            <a:endParaRPr/>
+          </a:p>
         </p:txBody>
       </p:sp>
       <p:sp>
@@ -3240,7 +3246,10 @@
         </p:spPr>
         <p:txBody>
           <a:bodyPr/>
-          <a:p/>
+          <a:lstStyle/>
+          <a:p>
+            <a:endParaRPr/>
+          </a:p>
         </p:txBody>
       </p:sp>
       <p:sp>
@@ -3344,7 +3353,10 @@
         </p:spPr>
         <p:txBody>
           <a:bodyPr/>
-          <a:p/>
+          <a:lstStyle/>
+          <a:p>
+            <a:endParaRPr/>
+          </a:p>
         </p:txBody>
       </p:sp>
       <p:sp>
@@ -3448,7 +3460,10 @@
         </p:spPr>
         <p:txBody>
           <a:bodyPr/>
-          <a:p/>
+          <a:lstStyle/>
+          <a:p>
+            <a:endParaRPr/>
+          </a:p>
         </p:txBody>
       </p:sp>
       <p:sp>
@@ -4830,7 +4845,18 @@
                 <a:ea typeface="Cambria" pitchFamily="34" charset="-122"/>
                 <a:cs typeface="Cambria" pitchFamily="34" charset="-120"/>
               </a:rPr>
-              <a:t>Dampak: Efisiensi Proses Pelaporan Bulanan</a:t>
+              <a:t>Dampak: Efisiensi Proses </a:t>
+            </a:r>
+            <a:r>
+              <a:rPr lang="en-US" sz="3200" b="1" dirty="0" err="1">
+                <a:solidFill>
+                  <a:srgbClr val="0B2447"/>
+                </a:solidFill>
+                <a:latin typeface="Cambria" pitchFamily="34" charset="0"/>
+                <a:ea typeface="Cambria" pitchFamily="34" charset="-122"/>
+                <a:cs typeface="Cambria" pitchFamily="34" charset="-120"/>
+              </a:rPr>
+              <a:t>Pelaporan</a:t>
             </a:r>
             <a:endParaRPr lang="en-US" sz="3200" dirty="0"/>
           </a:p>
@@ -4840,7 +4866,13 @@
         <p:nvGraphicFramePr>
           <p:cNvPr id="4" name="Chart 0"/>
           <p:cNvGraphicFramePr/>
-          <p:nvPr/>
+          <p:nvPr>
+            <p:extLst>
+              <p:ext uri="{D42A27DB-BD31-4B8C-83A1-F6EECF244321}">
+                <p14:modId xmlns:p14="http://schemas.microsoft.com/office/powerpoint/2010/main" val="4030859134"/>
+              </p:ext>
+            </p:extLst>
+          </p:nvPr>
         </p:nvGraphicFramePr>
         <p:xfrm>
           <a:off x="548640" y="1691640"/>
@@ -4875,7 +4907,10 @@
         </p:spPr>
         <p:txBody>
           <a:bodyPr/>
-          <a:p/>
+          <a:lstStyle/>
+          <a:p>
+            <a:endParaRPr/>
+          </a:p>
         </p:txBody>
       </p:sp>
       <p:sp>
@@ -5267,7 +5302,10 @@
         </p:spPr>
         <p:txBody>
           <a:bodyPr/>
-          <a:p/>
+          <a:lstStyle/>
+          <a:p>
+            <a:endParaRPr/>
+          </a:p>
         </p:txBody>
       </p:sp>
       <p:sp>
@@ -5426,7 +5464,10 @@
         </p:spPr>
         <p:txBody>
           <a:bodyPr/>
-          <a:p/>
+          <a:lstStyle/>
+          <a:p>
+            <a:endParaRPr/>
+          </a:p>
         </p:txBody>
       </p:sp>
       <p:sp>
@@ -8230,7 +8271,7 @@
                 <a:ea typeface="Calibri" pitchFamily="34" charset="-122"/>
                 <a:cs typeface="Calibri" pitchFamily="34" charset="-120"/>
               </a:rPr>
-              <a:t>Bagaimana tingkat penerimaan pengguna terhadap platform berdasarkan Black-Box Testing dan evaluasi usability?</a:t>
+              <a:t>Bagaimana tingkat penerimaan pengguna terhadap platform berdasarkan Black-Box Testing?</a:t>
             </a:r>
             <a:endParaRPr lang="en-US" sz="1300" dirty="0"/>
           </a:p>
